--- a/figure/cp3/fig3-4_biformer_diagram.pptx
+++ b/figure/cp3/fig3-4_biformer_diagram.pptx
@@ -4906,21 +4906,33 @@
           <p:nvPr/>
         </p:nvSpPr>
         <p:spPr>
-          <a:xfrm>
-            <a:off x="6480000" y="1332000"/>
+          <a:xfrm rot="0" flipH="false" flipV="false">
+            <a:off x="6071862" y="1278000"/>
             <a:ext cx="1620000" cy="1620000"/>
           </a:xfrm>
           <a:prstGeom prst="roundRect">
             <a:avLst/>
           </a:prstGeom>
           <a:solidFill>
-            <a:srgbClr val="DEEBF7"/>
+            <a:srgbClr val="DEEBF7">
+              <a:alpha val="100000"/>
+            </a:srgbClr>
           </a:solidFill>
           <a:ln w="19050">
             <a:solidFill>
-              <a:srgbClr val="2E75B6"/>
+              <a:srgbClr val="2E75B6">
+                <a:alpha val="100000"/>
+              </a:srgbClr>
             </a:solidFill>
+            <a:prstDash val="solid"/>
           </a:ln>
+          <a:effectLst>
+            <a:outerShdw blurRad="40000" dist="23000" dir="5400000" sx="100000" sy="100000" rotWithShape="false">
+              <a:srgbClr val="000000">
+                <a:alpha val="35000"/>
+              </a:srgbClr>
+            </a:outerShdw>
+          </a:effectLst>
         </p:spPr>
         <p:style>
           <a:lnRef idx="1">
@@ -4953,13 +4965,14 @@
         </p:nvSpPr>
         <p:spPr>
           <a:xfrm rot="0" flipH="false" flipV="false">
-            <a:off x="6768000" y="1350000"/>
+            <a:off x="6341862" y="1296000"/>
             <a:ext cx="1080000" cy="216000"/>
           </a:xfrm>
           <a:prstGeom prst="rect">
             <a:avLst/>
           </a:prstGeom>
           <a:noFill/>
+          <a:ln/>
         </p:spPr>
         <p:txBody>
           <a:bodyPr wrap="square">
@@ -4988,13 +5001,14 @@
         </p:nvSpPr>
         <p:spPr>
           <a:xfrm rot="0" flipH="false" flipV="false">
-            <a:off x="6768000" y="1566000"/>
+            <a:off x="6341862" y="1512000"/>
             <a:ext cx="1080000" cy="216000"/>
           </a:xfrm>
           <a:prstGeom prst="rect">
             <a:avLst/>
           </a:prstGeom>
           <a:noFill/>
+          <a:ln/>
         </p:spPr>
         <p:txBody>
           <a:bodyPr wrap="square">
@@ -5023,13 +5037,14 @@
         </p:nvSpPr>
         <p:spPr>
           <a:xfrm rot="0" flipH="false" flipV="false">
-            <a:off x="6768000" y="1782000"/>
+            <a:off x="6341862" y="1728000"/>
             <a:ext cx="1080000" cy="216000"/>
           </a:xfrm>
           <a:prstGeom prst="rect">
             <a:avLst/>
           </a:prstGeom>
           <a:noFill/>
+          <a:ln/>
         </p:spPr>
         <p:txBody>
           <a:bodyPr wrap="square">
@@ -5058,13 +5073,14 @@
         </p:nvSpPr>
         <p:spPr>
           <a:xfrm rot="0" flipH="false" flipV="false">
-            <a:off x="6768000" y="1998000"/>
+            <a:off x="6341862" y="1944000"/>
             <a:ext cx="1080000" cy="216000"/>
           </a:xfrm>
           <a:prstGeom prst="rect">
             <a:avLst/>
           </a:prstGeom>
           <a:noFill/>
+          <a:ln/>
         </p:spPr>
         <p:txBody>
           <a:bodyPr wrap="square">
@@ -5093,13 +5109,14 @@
         </p:nvSpPr>
         <p:spPr>
           <a:xfrm rot="0" flipH="false" flipV="false">
-            <a:off x="6768000" y="2214000"/>
+            <a:off x="6341862" y="2160000"/>
             <a:ext cx="1080000" cy="216000"/>
           </a:xfrm>
           <a:prstGeom prst="rect">
             <a:avLst/>
           </a:prstGeom>
           <a:noFill/>
+          <a:ln/>
         </p:spPr>
         <p:txBody>
           <a:bodyPr wrap="square">
@@ -5128,13 +5145,14 @@
         </p:nvSpPr>
         <p:spPr>
           <a:xfrm rot="0" flipH="false" flipV="false">
-            <a:off x="6768000" y="2430000"/>
+            <a:off x="6341862" y="2376000"/>
             <a:ext cx="1080000" cy="216000"/>
           </a:xfrm>
           <a:prstGeom prst="rect">
             <a:avLst/>
           </a:prstGeom>
           <a:noFill/>
+          <a:ln/>
         </p:spPr>
         <p:txBody>
           <a:bodyPr wrap="square">
@@ -5163,13 +5181,14 @@
         </p:nvSpPr>
         <p:spPr>
           <a:xfrm rot="0" flipH="false" flipV="false">
-            <a:off x="6768000" y="2646000"/>
+            <a:off x="6341862" y="2592000"/>
             <a:ext cx="1080000" cy="216000"/>
           </a:xfrm>
           <a:prstGeom prst="rect">
             <a:avLst/>
           </a:prstGeom>
           <a:noFill/>
+          <a:ln/>
         </p:spPr>
         <p:txBody>
           <a:bodyPr wrap="square">
@@ -5198,7 +5217,7 @@
         </p:nvSpPr>
         <p:spPr>
           <a:xfrm rot="0" flipH="false" flipV="false">
-            <a:off x="6408000" y="2988000"/>
+            <a:off x="5981862" y="2916000"/>
             <a:ext cx="1800000" cy="360000"/>
           </a:xfrm>
           <a:prstGeom prst="rect">
@@ -5568,6 +5587,197 @@
             <a:r>
               <a:rPr/>
               <a:t>← 第二层：令牌级注意力（细粒度）→</a:t>
+            </a:r>
+            <a:endParaRPr/>
+          </a:p>
+        </p:txBody>
+      </p:sp>
+      <p:sp>
+        <p:nvSpPr>
+          <p:cNvPr id="60" name=""/>
+          <p:cNvSpPr txBox="true"/>
+          <p:nvPr/>
+        </p:nvSpPr>
+        <p:spPr>
+          <a:xfrm rot="0" flipH="false" flipV="false">
+            <a:off x="7804250" y="1718675"/>
+            <a:ext cx="3111500" cy="882650"/>
+          </a:xfrm>
+          <a:prstGeom prst="rect">
+            <a:avLst/>
+          </a:prstGeom>
+          <a:ln w="12700">
+            <a:prstDash val="solid"/>
+          </a:ln>
+        </p:spPr>
+        <p:txBody>
+          <a:bodyPr wrap="square">
+            <a:spAutoFit/>
+          </a:bodyPr>
+          <a:lstStyle/>
+          <a:p>
+            <a:pPr marL="0" lvl="0" indent="0" algn="l" defTabSz="457200">
+              <a:lnSpc>
+                <a:spcPct val="100000"/>
+              </a:lnSpc>
+              <a:defRPr sz="1800">
+                <a:solidFill>
+                  <a:schemeClr val="tx1">
+                    <a:alpha val="100000"/>
+                  </a:schemeClr>
+                </a:solidFill>
+                <a:latin typeface="Calibri"/>
+                <a:ea typeface="宋体"/>
+                <a:cs typeface="+mn-cs"/>
+              </a:defRPr>
+            </a:pPr>
+            <a:r>
+              <a:rPr lang="zh-CN" sz="1300" b="false" i="false" u="none" strike="noStrike">
+                <a:solidFill>
+                  <a:schemeClr val="tx1">
+                    <a:alpha val="100000"/>
+                  </a:schemeClr>
+                </a:solidFill>
+                <a:latin typeface="宋体"/>
+                <a:ea typeface="宋体"/>
+                <a:cs typeface="+mn-cs"/>
+              </a:rPr>
+              <a:t>Q: </a:t>
+            </a:r>
+            <a:r>
+              <a:rPr lang="zh-CN" sz="1300" b="false" i="false" u="none" strike="noStrike">
+                <a:solidFill>
+                  <a:schemeClr val="tx1">
+                    <a:alpha val="100000"/>
+                  </a:schemeClr>
+                </a:solidFill>
+                <a:latin typeface="宋体"/>
+                <a:ea typeface="宋体"/>
+                <a:cs typeface="+mn-cs"/>
+              </a:rPr>
+              <a:t>查询向量</a:t>
+            </a:r>
+            <a:r>
+              <a:rPr lang="zh-CN" sz="1300" b="false" i="false" u="none" strike="noStrike">
+                <a:solidFill>
+                  <a:schemeClr val="tx1">
+                    <a:alpha val="100000"/>
+                  </a:schemeClr>
+                </a:solidFill>
+                <a:latin typeface="宋体"/>
+                <a:ea typeface="宋体"/>
+                <a:cs typeface="+mn-cs"/>
+              </a:rPr>
+              <a:t> (Query)   
+</a:t>
+            </a:r>
+            <a:r>
+              <a:rPr lang="zh-CN" sz="1300" b="false" i="false" u="none" strike="noStrike">
+                <a:solidFill>
+                  <a:schemeClr val="tx1">
+                    <a:alpha val="100000"/>
+                  </a:schemeClr>
+                </a:solidFill>
+                <a:latin typeface="宋体"/>
+                <a:ea typeface="宋体"/>
+                <a:cs typeface="+mn-cs"/>
+              </a:rPr>
+              <a:t>K: </a:t>
+            </a:r>
+            <a:r>
+              <a:rPr lang="zh-CN" sz="1300" b="false" i="false" u="none" strike="noStrike">
+                <a:solidFill>
+                  <a:schemeClr val="tx1">
+                    <a:alpha val="100000"/>
+                  </a:schemeClr>
+                </a:solidFill>
+                <a:latin typeface="宋体"/>
+                <a:ea typeface="宋体"/>
+                <a:cs typeface="+mn-cs"/>
+              </a:rPr>
+              <a:t>键向量</a:t>
+            </a:r>
+            <a:r>
+              <a:rPr lang="zh-CN" sz="1300" b="false" i="false" u="none" strike="noStrike">
+                <a:solidFill>
+                  <a:schemeClr val="tx1">
+                    <a:alpha val="100000"/>
+                  </a:schemeClr>
+                </a:solidFill>
+                <a:latin typeface="宋体"/>
+                <a:ea typeface="宋体"/>
+                <a:cs typeface="+mn-cs"/>
+              </a:rPr>
+              <a:t> (Key) 
+</a:t>
+            </a:r>
+            <a:r>
+              <a:rPr lang="zh-CN" sz="1300" b="false" i="false" u="none" strike="noStrike">
+                <a:solidFill>
+                  <a:schemeClr val="tx1">
+                    <a:alpha val="100000"/>
+                  </a:schemeClr>
+                </a:solidFill>
+                <a:latin typeface="宋体"/>
+                <a:ea typeface="宋体"/>
+                <a:cs typeface="+mn-cs"/>
+              </a:rPr>
+              <a:t>V: </a:t>
+            </a:r>
+            <a:r>
+              <a:rPr lang="zh-CN" sz="1300" b="false" i="false" u="none" strike="noStrike">
+                <a:solidFill>
+                  <a:schemeClr val="tx1">
+                    <a:alpha val="100000"/>
+                  </a:schemeClr>
+                </a:solidFill>
+                <a:latin typeface="宋体"/>
+                <a:ea typeface="宋体"/>
+                <a:cs typeface="+mn-cs"/>
+              </a:rPr>
+              <a:t>值向量</a:t>
+            </a:r>
+            <a:r>
+              <a:rPr lang="zh-CN" sz="1300" b="false" i="false" u="none" strike="noStrike">
+                <a:solidFill>
+                  <a:schemeClr val="tx1">
+                    <a:alpha val="100000"/>
+                  </a:schemeClr>
+                </a:solidFill>
+                <a:latin typeface="宋体"/>
+                <a:ea typeface="宋体"/>
+                <a:cs typeface="+mn-cs"/>
+              </a:rPr>
+              <a:t> (Value)  </a:t>
+            </a:r>
+            <a:br>
+              <a:rPr/>
+            </a:br>
+            <a:r>
+              <a:rPr lang="zh-CN" sz="1300" b="false" i="false" u="none" strike="noStrike">
+                <a:solidFill>
+                  <a:schemeClr val="tx1">
+                    <a:alpha val="100000"/>
+                  </a:schemeClr>
+                </a:solidFill>
+                <a:latin typeface="宋体"/>
+                <a:ea typeface="宋体"/>
+                <a:cs typeface="+mn-cs"/>
+              </a:rPr>
+              <a:t>A: </a:t>
+            </a:r>
+            <a:r>
+              <a:rPr lang="zh-CN" sz="1300" b="false" i="false" u="none" strike="noStrike">
+                <a:solidFill>
+                  <a:schemeClr val="tx1">
+                    <a:alpha val="100000"/>
+                  </a:schemeClr>
+                </a:solidFill>
+                <a:latin typeface="宋体"/>
+                <a:ea typeface="宋体"/>
+                <a:cs typeface="+mn-cs"/>
+              </a:rPr>
+              <a:t>注意力权重</a:t>
             </a:r>
             <a:endParaRPr/>
           </a:p>
